--- a/Presentaion.pptx
+++ b/Presentaion.pptx
@@ -7,6 +7,8 @@
   <p:sldIdLst>
     <p:sldId id="256" r:id="rId2"/>
     <p:sldId id="257" r:id="rId3"/>
+    <p:sldId id="258" r:id="rId4"/>
+    <p:sldId id="259" r:id="rId5"/>
   </p:sldIdLst>
   <p:sldSz cx="12192000" cy="6858000"/>
   <p:notesSz cx="6858000" cy="9144000"/>
@@ -262,7 +264,7 @@
           <a:p>
             <a:fld id="{008F9853-8B30-4C9D-8748-9ECF4E7C0E1E}" type="datetimeFigureOut">
               <a:rPr lang="en-IN" smtClean="0"/>
-              <a:t>19-11-2025</a:t>
+              <a:t>25-01-2026</a:t>
             </a:fld>
             <a:endParaRPr lang="en-IN"/>
           </a:p>
@@ -462,7 +464,7 @@
           <a:p>
             <a:fld id="{008F9853-8B30-4C9D-8748-9ECF4E7C0E1E}" type="datetimeFigureOut">
               <a:rPr lang="en-IN" smtClean="0"/>
-              <a:t>19-11-2025</a:t>
+              <a:t>25-01-2026</a:t>
             </a:fld>
             <a:endParaRPr lang="en-IN"/>
           </a:p>
@@ -672,7 +674,7 @@
           <a:p>
             <a:fld id="{008F9853-8B30-4C9D-8748-9ECF4E7C0E1E}" type="datetimeFigureOut">
               <a:rPr lang="en-IN" smtClean="0"/>
-              <a:t>19-11-2025</a:t>
+              <a:t>25-01-2026</a:t>
             </a:fld>
             <a:endParaRPr lang="en-IN"/>
           </a:p>
@@ -872,7 +874,7 @@
           <a:p>
             <a:fld id="{008F9853-8B30-4C9D-8748-9ECF4E7C0E1E}" type="datetimeFigureOut">
               <a:rPr lang="en-IN" smtClean="0"/>
-              <a:t>19-11-2025</a:t>
+              <a:t>25-01-2026</a:t>
             </a:fld>
             <a:endParaRPr lang="en-IN"/>
           </a:p>
@@ -1148,7 +1150,7 @@
           <a:p>
             <a:fld id="{008F9853-8B30-4C9D-8748-9ECF4E7C0E1E}" type="datetimeFigureOut">
               <a:rPr lang="en-IN" smtClean="0"/>
-              <a:t>19-11-2025</a:t>
+              <a:t>25-01-2026</a:t>
             </a:fld>
             <a:endParaRPr lang="en-IN"/>
           </a:p>
@@ -1416,7 +1418,7 @@
           <a:p>
             <a:fld id="{008F9853-8B30-4C9D-8748-9ECF4E7C0E1E}" type="datetimeFigureOut">
               <a:rPr lang="en-IN" smtClean="0"/>
-              <a:t>19-11-2025</a:t>
+              <a:t>25-01-2026</a:t>
             </a:fld>
             <a:endParaRPr lang="en-IN"/>
           </a:p>
@@ -1831,7 +1833,7 @@
           <a:p>
             <a:fld id="{008F9853-8B30-4C9D-8748-9ECF4E7C0E1E}" type="datetimeFigureOut">
               <a:rPr lang="en-IN" smtClean="0"/>
-              <a:t>19-11-2025</a:t>
+              <a:t>25-01-2026</a:t>
             </a:fld>
             <a:endParaRPr lang="en-IN"/>
           </a:p>
@@ -1973,7 +1975,7 @@
           <a:p>
             <a:fld id="{008F9853-8B30-4C9D-8748-9ECF4E7C0E1E}" type="datetimeFigureOut">
               <a:rPr lang="en-IN" smtClean="0"/>
-              <a:t>19-11-2025</a:t>
+              <a:t>25-01-2026</a:t>
             </a:fld>
             <a:endParaRPr lang="en-IN"/>
           </a:p>
@@ -2086,7 +2088,7 @@
           <a:p>
             <a:fld id="{008F9853-8B30-4C9D-8748-9ECF4E7C0E1E}" type="datetimeFigureOut">
               <a:rPr lang="en-IN" smtClean="0"/>
-              <a:t>19-11-2025</a:t>
+              <a:t>25-01-2026</a:t>
             </a:fld>
             <a:endParaRPr lang="en-IN"/>
           </a:p>
@@ -2399,7 +2401,7 @@
           <a:p>
             <a:fld id="{008F9853-8B30-4C9D-8748-9ECF4E7C0E1E}" type="datetimeFigureOut">
               <a:rPr lang="en-IN" smtClean="0"/>
-              <a:t>19-11-2025</a:t>
+              <a:t>25-01-2026</a:t>
             </a:fld>
             <a:endParaRPr lang="en-IN"/>
           </a:p>
@@ -2688,7 +2690,7 @@
           <a:p>
             <a:fld id="{008F9853-8B30-4C9D-8748-9ECF4E7C0E1E}" type="datetimeFigureOut">
               <a:rPr lang="en-IN" smtClean="0"/>
-              <a:t>19-11-2025</a:t>
+              <a:t>25-01-2026</a:t>
             </a:fld>
             <a:endParaRPr lang="en-IN"/>
           </a:p>
@@ -2931,7 +2933,7 @@
           <a:p>
             <a:fld id="{008F9853-8B30-4C9D-8748-9ECF4E7C0E1E}" type="datetimeFigureOut">
               <a:rPr lang="en-IN" smtClean="0"/>
-              <a:t>19-11-2025</a:t>
+              <a:t>25-01-2026</a:t>
             </a:fld>
             <a:endParaRPr lang="en-IN"/>
           </a:p>
@@ -3636,8 +3638,8 @@
         </p:nvSpPr>
         <p:spPr>
           <a:xfrm>
-            <a:off x="550606" y="3228945"/>
-            <a:ext cx="6096000" cy="400110"/>
+            <a:off x="409268" y="3106030"/>
+            <a:ext cx="5391457" cy="2031325"/>
           </a:xfrm>
           <a:prstGeom prst="rect">
             <a:avLst/>
@@ -3651,10 +3653,24 @@
           <a:lstStyle/>
           <a:p>
             <a:r>
-              <a:rPr lang="en-US" sz="2000" dirty="0"/>
-              <a:t>The platform grew rapidly due to</a:t>
-            </a:r>
-            <a:endParaRPr lang="en-IN" sz="2000" dirty="0"/>
+              <a:rPr lang="en-US" dirty="0"/>
+              <a:t>In June 2025, </a:t>
+            </a:r>
+            <a:r>
+              <a:rPr lang="en-US" b="1" dirty="0" err="1">
+                <a:solidFill>
+                  <a:schemeClr val="accent6">
+                    <a:lumMod val="75000"/>
+                  </a:schemeClr>
+                </a:solidFill>
+              </a:rPr>
+              <a:t>QuickBite</a:t>
+            </a:r>
+            <a:r>
+              <a:rPr lang="en-US" dirty="0"/>
+              <a:t> faced a major crisis. A viral social media incident involving food safety violations at partner restaurants, combined with a week-long delivery outage during the monsoon season, triggered massive customer backlash. Competitors capitalized with aggressive campaigns, worsening the situation. </a:t>
+            </a:r>
+            <a:endParaRPr lang="en-IN" dirty="0"/>
           </a:p>
         </p:txBody>
       </p:sp>
@@ -3711,10 +3727,1100 @@
           </a:p>
         </p:txBody>
       </p:sp>
+      <p:pic>
+        <p:nvPicPr>
+          <p:cNvPr id="10" name="Picture 9">
+            <a:extLst>
+              <a:ext uri="{FF2B5EF4-FFF2-40B4-BE49-F238E27FC236}">
+                <a16:creationId xmlns:a16="http://schemas.microsoft.com/office/drawing/2014/main" id="{6F7024BA-4B15-C90A-A03F-58187CD86632}"/>
+              </a:ext>
+            </a:extLst>
+          </p:cNvPr>
+          <p:cNvPicPr>
+            <a:picLocks noChangeAspect="1"/>
+          </p:cNvPicPr>
+          <p:nvPr/>
+        </p:nvPicPr>
+        <p:blipFill>
+          <a:blip r:embed="rId3">
+            <a:extLst>
+              <a:ext uri="{28A0092B-C50C-407E-A947-70E740481C1C}">
+                <a14:useLocalDpi xmlns:a14="http://schemas.microsoft.com/office/drawing/2010/main" val="0"/>
+              </a:ext>
+            </a:extLst>
+          </a:blip>
+          <a:stretch>
+            <a:fillRect/>
+          </a:stretch>
+        </p:blipFill>
+        <p:spPr>
+          <a:xfrm>
+            <a:off x="5953432" y="2457450"/>
+            <a:ext cx="5829300" cy="3886200"/>
+          </a:xfrm>
+          <a:prstGeom prst="rect">
+            <a:avLst/>
+          </a:prstGeom>
+        </p:spPr>
+      </p:pic>
     </p:spTree>
     <p:extLst>
       <p:ext uri="{BB962C8B-B14F-4D97-AF65-F5344CB8AC3E}">
         <p14:creationId xmlns:p14="http://schemas.microsoft.com/office/powerpoint/2010/main" val="1030856126"/>
+      </p:ext>
+    </p:extLst>
+  </p:cSld>
+  <p:clrMapOvr>
+    <a:masterClrMapping/>
+  </p:clrMapOvr>
+</p:sld>
+</file>
+
+<file path=ppt/slides/slide3.xml><?xml version="1.0" encoding="utf-8"?>
+<p:sld xmlns:a="http://schemas.openxmlformats.org/drawingml/2006/main" xmlns:r="http://schemas.openxmlformats.org/officeDocument/2006/relationships" xmlns:p="http://schemas.openxmlformats.org/presentationml/2006/main">
+  <p:cSld>
+    <p:spTree>
+      <p:nvGrpSpPr>
+        <p:cNvPr id="1" name=""/>
+        <p:cNvGrpSpPr/>
+        <p:nvPr/>
+      </p:nvGrpSpPr>
+      <p:grpSpPr>
+        <a:xfrm>
+          <a:off x="0" y="0"/>
+          <a:ext cx="0" cy="0"/>
+          <a:chOff x="0" y="0"/>
+          <a:chExt cx="0" cy="0"/>
+        </a:xfrm>
+      </p:grpSpPr>
+      <p:sp>
+        <p:nvSpPr>
+          <p:cNvPr id="2" name="TextBox 1">
+            <a:extLst>
+              <a:ext uri="{FF2B5EF4-FFF2-40B4-BE49-F238E27FC236}">
+                <a16:creationId xmlns:a16="http://schemas.microsoft.com/office/drawing/2014/main" id="{2ED32935-5BD6-06AD-EA39-657CE86ABEA1}"/>
+              </a:ext>
+            </a:extLst>
+          </p:cNvPr>
+          <p:cNvSpPr txBox="1"/>
+          <p:nvPr/>
+        </p:nvSpPr>
+        <p:spPr>
+          <a:xfrm>
+            <a:off x="276225" y="228600"/>
+            <a:ext cx="2914580" cy="461665"/>
+          </a:xfrm>
+          <a:prstGeom prst="rect">
+            <a:avLst/>
+          </a:prstGeom>
+          <a:noFill/>
+        </p:spPr>
+        <p:txBody>
+          <a:bodyPr wrap="none" rtlCol="0">
+            <a:spAutoFit/>
+          </a:bodyPr>
+          <a:lstStyle/>
+          <a:p>
+            <a:r>
+              <a:rPr lang="en-IN" sz="2400" b="1" dirty="0">
+                <a:solidFill>
+                  <a:srgbClr val="FF0000"/>
+                </a:solidFill>
+              </a:rPr>
+              <a:t>Impact of the Crisis</a:t>
+            </a:r>
+          </a:p>
+        </p:txBody>
+      </p:sp>
+    </p:spTree>
+    <p:extLst>
+      <p:ext uri="{BB962C8B-B14F-4D97-AF65-F5344CB8AC3E}">
+        <p14:creationId xmlns:p14="http://schemas.microsoft.com/office/powerpoint/2010/main" val="355084876"/>
+      </p:ext>
+    </p:extLst>
+  </p:cSld>
+  <p:clrMapOvr>
+    <a:masterClrMapping/>
+  </p:clrMapOvr>
+</p:sld>
+</file>
+
+<file path=ppt/slides/slide4.xml><?xml version="1.0" encoding="utf-8"?>
+<p:sld xmlns:a="http://schemas.openxmlformats.org/drawingml/2006/main" xmlns:r="http://schemas.openxmlformats.org/officeDocument/2006/relationships" xmlns:p="http://schemas.openxmlformats.org/presentationml/2006/main">
+  <p:cSld>
+    <p:spTree>
+      <p:nvGrpSpPr>
+        <p:cNvPr id="1" name=""/>
+        <p:cNvGrpSpPr/>
+        <p:nvPr/>
+      </p:nvGrpSpPr>
+      <p:grpSpPr>
+        <a:xfrm>
+          <a:off x="0" y="0"/>
+          <a:ext cx="0" cy="0"/>
+          <a:chOff x="0" y="0"/>
+          <a:chExt cx="0" cy="0"/>
+        </a:xfrm>
+      </p:grpSpPr>
+      <p:grpSp>
+        <p:nvGrpSpPr>
+          <p:cNvPr id="11" name="Group 10">
+            <a:extLst>
+              <a:ext uri="{FF2B5EF4-FFF2-40B4-BE49-F238E27FC236}">
+                <a16:creationId xmlns:a16="http://schemas.microsoft.com/office/drawing/2014/main" id="{F00350ED-26CF-0967-C591-69B51D3444ED}"/>
+              </a:ext>
+            </a:extLst>
+          </p:cNvPr>
+          <p:cNvGrpSpPr/>
+          <p:nvPr/>
+        </p:nvGrpSpPr>
+        <p:grpSpPr>
+          <a:xfrm>
+            <a:off x="4100512" y="403722"/>
+            <a:ext cx="3990975" cy="409575"/>
+            <a:chOff x="3401784" y="368855"/>
+            <a:chExt cx="3990975" cy="409575"/>
+          </a:xfrm>
+        </p:grpSpPr>
+        <p:sp>
+          <p:nvSpPr>
+            <p:cNvPr id="7" name="Rectangle: Rounded Corners 6">
+              <a:extLst>
+                <a:ext uri="{FF2B5EF4-FFF2-40B4-BE49-F238E27FC236}">
+                  <a16:creationId xmlns:a16="http://schemas.microsoft.com/office/drawing/2014/main" id="{DA3A1F93-46A5-447A-DB62-7680B6C3C347}"/>
+                </a:ext>
+              </a:extLst>
+            </p:cNvPr>
+            <p:cNvSpPr/>
+            <p:nvPr/>
+          </p:nvSpPr>
+          <p:spPr>
+            <a:xfrm>
+              <a:off x="3401784" y="368855"/>
+              <a:ext cx="3990975" cy="409575"/>
+            </a:xfrm>
+            <a:prstGeom prst="roundRect">
+              <a:avLst/>
+            </a:prstGeom>
+          </p:spPr>
+          <p:style>
+            <a:lnRef idx="2">
+              <a:schemeClr val="accent6">
+                <a:shade val="15000"/>
+              </a:schemeClr>
+            </a:lnRef>
+            <a:fillRef idx="1">
+              <a:schemeClr val="accent6"/>
+            </a:fillRef>
+            <a:effectRef idx="0">
+              <a:schemeClr val="accent6"/>
+            </a:effectRef>
+            <a:fontRef idx="minor">
+              <a:schemeClr val="lt1"/>
+            </a:fontRef>
+          </p:style>
+          <p:txBody>
+            <a:bodyPr rtlCol="0" anchor="ctr"/>
+            <a:lstStyle/>
+            <a:p>
+              <a:pPr algn="ctr"/>
+              <a:endParaRPr lang="en-IN"/>
+            </a:p>
+          </p:txBody>
+        </p:sp>
+        <p:sp>
+          <p:nvSpPr>
+            <p:cNvPr id="6" name="TextBox 5">
+              <a:extLst>
+                <a:ext uri="{FF2B5EF4-FFF2-40B4-BE49-F238E27FC236}">
+                  <a16:creationId xmlns:a16="http://schemas.microsoft.com/office/drawing/2014/main" id="{C3AFDC2E-C1EE-84B6-3A72-48AC7D1F81BC}"/>
+                </a:ext>
+              </a:extLst>
+            </p:cNvPr>
+            <p:cNvSpPr txBox="1"/>
+            <p:nvPr/>
+          </p:nvSpPr>
+          <p:spPr>
+            <a:xfrm>
+              <a:off x="3848098" y="383143"/>
+              <a:ext cx="3098349" cy="369332"/>
+            </a:xfrm>
+            <a:prstGeom prst="rect">
+              <a:avLst/>
+            </a:prstGeom>
+            <a:noFill/>
+          </p:spPr>
+          <p:txBody>
+            <a:bodyPr wrap="none" rtlCol="0">
+              <a:spAutoFit/>
+            </a:bodyPr>
+            <a:lstStyle/>
+            <a:p>
+              <a:r>
+                <a:rPr lang="en-IN" b="1" dirty="0">
+                  <a:solidFill>
+                    <a:schemeClr val="bg1"/>
+                  </a:solidFill>
+                </a:rPr>
+                <a:t>Food Delivery Space - INDIA</a:t>
+              </a:r>
+            </a:p>
+          </p:txBody>
+        </p:sp>
+      </p:grpSp>
+      <p:grpSp>
+        <p:nvGrpSpPr>
+          <p:cNvPr id="10" name="Group 9">
+            <a:extLst>
+              <a:ext uri="{FF2B5EF4-FFF2-40B4-BE49-F238E27FC236}">
+                <a16:creationId xmlns:a16="http://schemas.microsoft.com/office/drawing/2014/main" id="{3235CEF5-C045-3BDC-4E20-7B660C063CF3}"/>
+              </a:ext>
+            </a:extLst>
+          </p:cNvPr>
+          <p:cNvGrpSpPr/>
+          <p:nvPr/>
+        </p:nvGrpSpPr>
+        <p:grpSpPr>
+          <a:xfrm>
+            <a:off x="337116" y="944095"/>
+            <a:ext cx="11517766" cy="3477754"/>
+            <a:chOff x="378960" y="1277470"/>
+            <a:chExt cx="11517766" cy="3477754"/>
+          </a:xfrm>
+        </p:grpSpPr>
+        <p:sp>
+          <p:nvSpPr>
+            <p:cNvPr id="8" name="Rectangle: Rounded Corners 7">
+              <a:extLst>
+                <a:ext uri="{FF2B5EF4-FFF2-40B4-BE49-F238E27FC236}">
+                  <a16:creationId xmlns:a16="http://schemas.microsoft.com/office/drawing/2014/main" id="{C62A56F6-C33A-0801-33B2-E03670BBCB05}"/>
+                </a:ext>
+              </a:extLst>
+            </p:cNvPr>
+            <p:cNvSpPr/>
+            <p:nvPr/>
+          </p:nvSpPr>
+          <p:spPr>
+            <a:xfrm>
+              <a:off x="378960" y="1277470"/>
+              <a:ext cx="11517766" cy="3477754"/>
+            </a:xfrm>
+            <a:prstGeom prst="rect">
+              <a:avLst/>
+            </a:prstGeom>
+            <a:solidFill>
+              <a:srgbClr val="FEFBFE"/>
+            </a:solidFill>
+            <a:ln>
+              <a:solidFill>
+                <a:schemeClr val="tx1"/>
+              </a:solidFill>
+            </a:ln>
+          </p:spPr>
+          <p:style>
+            <a:lnRef idx="2">
+              <a:schemeClr val="accent6">
+                <a:shade val="15000"/>
+              </a:schemeClr>
+            </a:lnRef>
+            <a:fillRef idx="1">
+              <a:schemeClr val="accent6"/>
+            </a:fillRef>
+            <a:effectRef idx="0">
+              <a:schemeClr val="accent6"/>
+            </a:effectRef>
+            <a:fontRef idx="minor">
+              <a:schemeClr val="lt1"/>
+            </a:fontRef>
+          </p:style>
+          <p:txBody>
+            <a:bodyPr rtlCol="0" anchor="ctr"/>
+            <a:lstStyle/>
+            <a:p>
+              <a:pPr algn="ctr"/>
+              <a:endParaRPr lang="en-IN"/>
+            </a:p>
+          </p:txBody>
+        </p:sp>
+        <p:pic>
+          <p:nvPicPr>
+            <p:cNvPr id="5" name="Picture 4">
+              <a:extLst>
+                <a:ext uri="{FF2B5EF4-FFF2-40B4-BE49-F238E27FC236}">
+                  <a16:creationId xmlns:a16="http://schemas.microsoft.com/office/drawing/2014/main" id="{6198A6B5-7242-02EC-2451-EF5E8899D5A6}"/>
+                </a:ext>
+              </a:extLst>
+            </p:cNvPr>
+            <p:cNvPicPr>
+              <a:picLocks noChangeAspect="1"/>
+            </p:cNvPicPr>
+            <p:nvPr/>
+          </p:nvPicPr>
+          <p:blipFill>
+            <a:blip r:embed="rId2">
+              <a:extLst>
+                <a:ext uri="{28A0092B-C50C-407E-A947-70E740481C1C}">
+                  <a14:useLocalDpi xmlns:a14="http://schemas.microsoft.com/office/drawing/2010/main" val="0"/>
+                </a:ext>
+              </a:extLst>
+            </a:blip>
+            <a:stretch>
+              <a:fillRect/>
+            </a:stretch>
+          </p:blipFill>
+          <p:spPr>
+            <a:xfrm>
+              <a:off x="485774" y="1662892"/>
+              <a:ext cx="11327265" cy="2909108"/>
+            </a:xfrm>
+            <a:prstGeom prst="rect">
+              <a:avLst/>
+            </a:prstGeom>
+          </p:spPr>
+        </p:pic>
+        <p:sp>
+          <p:nvSpPr>
+            <p:cNvPr id="9" name="Rectangle: Rounded Corners 7">
+              <a:extLst>
+                <a:ext uri="{FF2B5EF4-FFF2-40B4-BE49-F238E27FC236}">
+                  <a16:creationId xmlns:a16="http://schemas.microsoft.com/office/drawing/2014/main" id="{41F44D97-6051-FC92-6651-82BA4545A2D0}"/>
+                </a:ext>
+              </a:extLst>
+            </p:cNvPr>
+            <p:cNvSpPr/>
+            <p:nvPr/>
+          </p:nvSpPr>
+          <p:spPr>
+            <a:xfrm flipV="1">
+              <a:off x="8677275" y="1662892"/>
+              <a:ext cx="3028951" cy="454951"/>
+            </a:xfrm>
+            <a:custGeom>
+              <a:avLst/>
+              <a:gdLst>
+                <a:gd name="csX0" fmla="*/ 0 w 11489191"/>
+                <a:gd name="csY0" fmla="*/ 578888 h 3473256"/>
+                <a:gd name="csX1" fmla="*/ 578888 w 11489191"/>
+                <a:gd name="csY1" fmla="*/ 0 h 3473256"/>
+                <a:gd name="csX2" fmla="*/ 10910303 w 11489191"/>
+                <a:gd name="csY2" fmla="*/ 0 h 3473256"/>
+                <a:gd name="csX3" fmla="*/ 11489191 w 11489191"/>
+                <a:gd name="csY3" fmla="*/ 578888 h 3473256"/>
+                <a:gd name="csX4" fmla="*/ 11489191 w 11489191"/>
+                <a:gd name="csY4" fmla="*/ 2894368 h 3473256"/>
+                <a:gd name="csX5" fmla="*/ 10910303 w 11489191"/>
+                <a:gd name="csY5" fmla="*/ 3473256 h 3473256"/>
+                <a:gd name="csX6" fmla="*/ 578888 w 11489191"/>
+                <a:gd name="csY6" fmla="*/ 3473256 h 3473256"/>
+                <a:gd name="csX7" fmla="*/ 0 w 11489191"/>
+                <a:gd name="csY7" fmla="*/ 2894368 h 3473256"/>
+                <a:gd name="csX8" fmla="*/ 0 w 11489191"/>
+                <a:gd name="csY8" fmla="*/ 578888 h 3473256"/>
+                <a:gd name="csX0" fmla="*/ 9525 w 11489191"/>
+                <a:gd name="csY0" fmla="*/ 276337 h 3475505"/>
+                <a:gd name="csX1" fmla="*/ 578888 w 11489191"/>
+                <a:gd name="csY1" fmla="*/ 2249 h 3475505"/>
+                <a:gd name="csX2" fmla="*/ 10910303 w 11489191"/>
+                <a:gd name="csY2" fmla="*/ 2249 h 3475505"/>
+                <a:gd name="csX3" fmla="*/ 11489191 w 11489191"/>
+                <a:gd name="csY3" fmla="*/ 581137 h 3475505"/>
+                <a:gd name="csX4" fmla="*/ 11489191 w 11489191"/>
+                <a:gd name="csY4" fmla="*/ 2896617 h 3475505"/>
+                <a:gd name="csX5" fmla="*/ 10910303 w 11489191"/>
+                <a:gd name="csY5" fmla="*/ 3475505 h 3475505"/>
+                <a:gd name="csX6" fmla="*/ 578888 w 11489191"/>
+                <a:gd name="csY6" fmla="*/ 3475505 h 3475505"/>
+                <a:gd name="csX7" fmla="*/ 0 w 11489191"/>
+                <a:gd name="csY7" fmla="*/ 2896617 h 3475505"/>
+                <a:gd name="csX8" fmla="*/ 9525 w 11489191"/>
+                <a:gd name="csY8" fmla="*/ 276337 h 3475505"/>
+                <a:gd name="csX0" fmla="*/ 9525 w 11489191"/>
+                <a:gd name="csY0" fmla="*/ 276337 h 3475505"/>
+                <a:gd name="csX1" fmla="*/ 578888 w 11489191"/>
+                <a:gd name="csY1" fmla="*/ 2249 h 3475505"/>
+                <a:gd name="csX2" fmla="*/ 10910303 w 11489191"/>
+                <a:gd name="csY2" fmla="*/ 2249 h 3475505"/>
+                <a:gd name="csX3" fmla="*/ 11489191 w 11489191"/>
+                <a:gd name="csY3" fmla="*/ 581137 h 3475505"/>
+                <a:gd name="csX4" fmla="*/ 11489191 w 11489191"/>
+                <a:gd name="csY4" fmla="*/ 2896617 h 3475505"/>
+                <a:gd name="csX5" fmla="*/ 10910303 w 11489191"/>
+                <a:gd name="csY5" fmla="*/ 3475505 h 3475505"/>
+                <a:gd name="csX6" fmla="*/ 331238 w 11489191"/>
+                <a:gd name="csY6" fmla="*/ 3475505 h 3475505"/>
+                <a:gd name="csX7" fmla="*/ 0 w 11489191"/>
+                <a:gd name="csY7" fmla="*/ 2896617 h 3475505"/>
+                <a:gd name="csX8" fmla="*/ 9525 w 11489191"/>
+                <a:gd name="csY8" fmla="*/ 276337 h 3475505"/>
+                <a:gd name="csX0" fmla="*/ 9525 w 11508241"/>
+                <a:gd name="csY0" fmla="*/ 276337 h 3475505"/>
+                <a:gd name="csX1" fmla="*/ 578888 w 11508241"/>
+                <a:gd name="csY1" fmla="*/ 2249 h 3475505"/>
+                <a:gd name="csX2" fmla="*/ 10910303 w 11508241"/>
+                <a:gd name="csY2" fmla="*/ 2249 h 3475505"/>
+                <a:gd name="csX3" fmla="*/ 11508241 w 11508241"/>
+                <a:gd name="csY3" fmla="*/ 362062 h 3475505"/>
+                <a:gd name="csX4" fmla="*/ 11489191 w 11508241"/>
+                <a:gd name="csY4" fmla="*/ 2896617 h 3475505"/>
+                <a:gd name="csX5" fmla="*/ 10910303 w 11508241"/>
+                <a:gd name="csY5" fmla="*/ 3475505 h 3475505"/>
+                <a:gd name="csX6" fmla="*/ 331238 w 11508241"/>
+                <a:gd name="csY6" fmla="*/ 3475505 h 3475505"/>
+                <a:gd name="csX7" fmla="*/ 0 w 11508241"/>
+                <a:gd name="csY7" fmla="*/ 2896617 h 3475505"/>
+                <a:gd name="csX8" fmla="*/ 9525 w 11508241"/>
+                <a:gd name="csY8" fmla="*/ 276337 h 3475505"/>
+                <a:gd name="csX0" fmla="*/ 9525 w 11517766"/>
+                <a:gd name="csY0" fmla="*/ 276337 h 3477754"/>
+                <a:gd name="csX1" fmla="*/ 578888 w 11517766"/>
+                <a:gd name="csY1" fmla="*/ 2249 h 3477754"/>
+                <a:gd name="csX2" fmla="*/ 10910303 w 11517766"/>
+                <a:gd name="csY2" fmla="*/ 2249 h 3477754"/>
+                <a:gd name="csX3" fmla="*/ 11508241 w 11517766"/>
+                <a:gd name="csY3" fmla="*/ 362062 h 3477754"/>
+                <a:gd name="csX4" fmla="*/ 11517766 w 11517766"/>
+                <a:gd name="csY4" fmla="*/ 3201417 h 3477754"/>
+                <a:gd name="csX5" fmla="*/ 10910303 w 11517766"/>
+                <a:gd name="csY5" fmla="*/ 3475505 h 3477754"/>
+                <a:gd name="csX6" fmla="*/ 331238 w 11517766"/>
+                <a:gd name="csY6" fmla="*/ 3475505 h 3477754"/>
+                <a:gd name="csX7" fmla="*/ 0 w 11517766"/>
+                <a:gd name="csY7" fmla="*/ 2896617 h 3477754"/>
+                <a:gd name="csX8" fmla="*/ 9525 w 11517766"/>
+                <a:gd name="csY8" fmla="*/ 276337 h 3477754"/>
+              </a:gdLst>
+              <a:ahLst/>
+              <a:cxnLst>
+                <a:cxn ang="0">
+                  <a:pos x="csX0" y="csY0"/>
+                </a:cxn>
+                <a:cxn ang="0">
+                  <a:pos x="csX1" y="csY1"/>
+                </a:cxn>
+                <a:cxn ang="0">
+                  <a:pos x="csX2" y="csY2"/>
+                </a:cxn>
+                <a:cxn ang="0">
+                  <a:pos x="csX3" y="csY3"/>
+                </a:cxn>
+                <a:cxn ang="0">
+                  <a:pos x="csX4" y="csY4"/>
+                </a:cxn>
+                <a:cxn ang="0">
+                  <a:pos x="csX5" y="csY5"/>
+                </a:cxn>
+                <a:cxn ang="0">
+                  <a:pos x="csX6" y="csY6"/>
+                </a:cxn>
+                <a:cxn ang="0">
+                  <a:pos x="csX7" y="csY7"/>
+                </a:cxn>
+                <a:cxn ang="0">
+                  <a:pos x="csX8" y="csY8"/>
+                </a:cxn>
+              </a:cxnLst>
+              <a:rect l="l" t="t" r="r" b="b"/>
+              <a:pathLst>
+                <a:path w="11517766" h="3477754">
+                  <a:moveTo>
+                    <a:pt x="9525" y="276337"/>
+                  </a:moveTo>
+                  <a:cubicBezTo>
+                    <a:pt x="9525" y="-43374"/>
+                    <a:pt x="259177" y="2249"/>
+                    <a:pt x="578888" y="2249"/>
+                  </a:cubicBezTo>
+                  <a:lnTo>
+                    <a:pt x="10910303" y="2249"/>
+                  </a:lnTo>
+                  <a:cubicBezTo>
+                    <a:pt x="11230014" y="2249"/>
+                    <a:pt x="11508241" y="42351"/>
+                    <a:pt x="11508241" y="362062"/>
+                  </a:cubicBezTo>
+                  <a:lnTo>
+                    <a:pt x="11517766" y="3201417"/>
+                  </a:lnTo>
+                  <a:cubicBezTo>
+                    <a:pt x="11517766" y="3521128"/>
+                    <a:pt x="11230014" y="3475505"/>
+                    <a:pt x="10910303" y="3475505"/>
+                  </a:cubicBezTo>
+                  <a:lnTo>
+                    <a:pt x="331238" y="3475505"/>
+                  </a:lnTo>
+                  <a:cubicBezTo>
+                    <a:pt x="11527" y="3475505"/>
+                    <a:pt x="0" y="3216328"/>
+                    <a:pt x="0" y="2896617"/>
+                  </a:cubicBezTo>
+                  <a:cubicBezTo>
+                    <a:pt x="0" y="2124790"/>
+                    <a:pt x="9525" y="1048164"/>
+                    <a:pt x="9525" y="276337"/>
+                  </a:cubicBezTo>
+                  <a:close/>
+                </a:path>
+              </a:pathLst>
+            </a:custGeom>
+            <a:solidFill>
+              <a:srgbClr val="FEFBFE"/>
+            </a:solidFill>
+            <a:ln>
+              <a:solidFill>
+                <a:srgbClr val="FEFCFD"/>
+              </a:solidFill>
+            </a:ln>
+          </p:spPr>
+          <p:style>
+            <a:lnRef idx="2">
+              <a:schemeClr val="accent6">
+                <a:shade val="15000"/>
+              </a:schemeClr>
+            </a:lnRef>
+            <a:fillRef idx="1">
+              <a:schemeClr val="accent6"/>
+            </a:fillRef>
+            <a:effectRef idx="0">
+              <a:schemeClr val="accent6"/>
+            </a:effectRef>
+            <a:fontRef idx="minor">
+              <a:schemeClr val="lt1"/>
+            </a:fontRef>
+          </p:style>
+          <p:txBody>
+            <a:bodyPr rtlCol="0" anchor="ctr"/>
+            <a:lstStyle/>
+            <a:p>
+              <a:pPr algn="ctr"/>
+              <a:endParaRPr lang="en-IN"/>
+            </a:p>
+          </p:txBody>
+        </p:sp>
+      </p:grpSp>
+      <p:sp>
+        <p:nvSpPr>
+          <p:cNvPr id="12" name="Rectangle: Rounded Corners 11">
+            <a:extLst>
+              <a:ext uri="{FF2B5EF4-FFF2-40B4-BE49-F238E27FC236}">
+                <a16:creationId xmlns:a16="http://schemas.microsoft.com/office/drawing/2014/main" id="{955AC71D-FF69-B64E-58CD-65EEF563145B}"/>
+              </a:ext>
+            </a:extLst>
+          </p:cNvPr>
+          <p:cNvSpPr/>
+          <p:nvPr/>
+        </p:nvSpPr>
+        <p:spPr>
+          <a:xfrm>
+            <a:off x="443930" y="4807271"/>
+            <a:ext cx="1619250" cy="1212529"/>
+          </a:xfrm>
+          <a:prstGeom prst="roundRect">
+            <a:avLst/>
+          </a:prstGeom>
+          <a:solidFill>
+            <a:srgbClr val="FEFCFD"/>
+          </a:solidFill>
+        </p:spPr>
+        <p:style>
+          <a:lnRef idx="2">
+            <a:schemeClr val="accent1">
+              <a:shade val="15000"/>
+            </a:schemeClr>
+          </a:lnRef>
+          <a:fillRef idx="1">
+            <a:schemeClr val="accent1"/>
+          </a:fillRef>
+          <a:effectRef idx="0">
+            <a:schemeClr val="accent1"/>
+          </a:effectRef>
+          <a:fontRef idx="minor">
+            <a:schemeClr val="lt1"/>
+          </a:fontRef>
+        </p:style>
+        <p:txBody>
+          <a:bodyPr rtlCol="0" anchor="ctr"/>
+          <a:lstStyle/>
+          <a:p>
+            <a:pPr algn="ctr"/>
+            <a:endParaRPr lang="en-IN"/>
+          </a:p>
+        </p:txBody>
+      </p:sp>
+      <p:sp>
+        <p:nvSpPr>
+          <p:cNvPr id="15" name="TextBox 14">
+            <a:extLst>
+              <a:ext uri="{FF2B5EF4-FFF2-40B4-BE49-F238E27FC236}">
+                <a16:creationId xmlns:a16="http://schemas.microsoft.com/office/drawing/2014/main" id="{EF16E061-0860-9160-6F18-E55D45FB54A1}"/>
+              </a:ext>
+            </a:extLst>
+          </p:cNvPr>
+          <p:cNvSpPr txBox="1"/>
+          <p:nvPr/>
+        </p:nvSpPr>
+        <p:spPr>
+          <a:xfrm>
+            <a:off x="708822" y="4905375"/>
+            <a:ext cx="1089465" cy="307777"/>
+          </a:xfrm>
+          <a:prstGeom prst="rect">
+            <a:avLst/>
+          </a:prstGeom>
+          <a:noFill/>
+        </p:spPr>
+        <p:txBody>
+          <a:bodyPr wrap="none" rtlCol="0">
+            <a:spAutoFit/>
+          </a:bodyPr>
+          <a:lstStyle/>
+          <a:p>
+            <a:r>
+              <a:rPr lang="en-IN" sz="1400" b="1" dirty="0"/>
+              <a:t>Customers</a:t>
+            </a:r>
+          </a:p>
+        </p:txBody>
+      </p:sp>
+      <p:sp>
+        <p:nvSpPr>
+          <p:cNvPr id="16" name="Rectangle: Rounded Corners 15">
+            <a:extLst>
+              <a:ext uri="{FF2B5EF4-FFF2-40B4-BE49-F238E27FC236}">
+                <a16:creationId xmlns:a16="http://schemas.microsoft.com/office/drawing/2014/main" id="{C7A3EF3C-EC5A-BAA4-C523-3418905C9189}"/>
+              </a:ext>
+            </a:extLst>
+          </p:cNvPr>
+          <p:cNvSpPr/>
+          <p:nvPr/>
+        </p:nvSpPr>
+        <p:spPr>
+          <a:xfrm>
+            <a:off x="2328072" y="4807271"/>
+            <a:ext cx="1619250" cy="1212529"/>
+          </a:xfrm>
+          <a:prstGeom prst="roundRect">
+            <a:avLst/>
+          </a:prstGeom>
+          <a:solidFill>
+            <a:srgbClr val="FEFCFD"/>
+          </a:solidFill>
+        </p:spPr>
+        <p:style>
+          <a:lnRef idx="2">
+            <a:schemeClr val="accent1">
+              <a:shade val="15000"/>
+            </a:schemeClr>
+          </a:lnRef>
+          <a:fillRef idx="1">
+            <a:schemeClr val="accent1"/>
+          </a:fillRef>
+          <a:effectRef idx="0">
+            <a:schemeClr val="accent1"/>
+          </a:effectRef>
+          <a:fontRef idx="minor">
+            <a:schemeClr val="lt1"/>
+          </a:fontRef>
+        </p:style>
+        <p:txBody>
+          <a:bodyPr rtlCol="0" anchor="ctr"/>
+          <a:lstStyle/>
+          <a:p>
+            <a:pPr algn="ctr"/>
+            <a:endParaRPr lang="en-IN"/>
+          </a:p>
+        </p:txBody>
+      </p:sp>
+      <p:sp>
+        <p:nvSpPr>
+          <p:cNvPr id="17" name="TextBox 16">
+            <a:extLst>
+              <a:ext uri="{FF2B5EF4-FFF2-40B4-BE49-F238E27FC236}">
+                <a16:creationId xmlns:a16="http://schemas.microsoft.com/office/drawing/2014/main" id="{5FB1DF8F-CD6F-965A-205F-30C0147B616E}"/>
+              </a:ext>
+            </a:extLst>
+          </p:cNvPr>
+          <p:cNvSpPr txBox="1"/>
+          <p:nvPr/>
+        </p:nvSpPr>
+        <p:spPr>
+          <a:xfrm>
+            <a:off x="2545339" y="4905375"/>
+            <a:ext cx="1177630" cy="307777"/>
+          </a:xfrm>
+          <a:prstGeom prst="rect">
+            <a:avLst/>
+          </a:prstGeom>
+          <a:noFill/>
+        </p:spPr>
+        <p:txBody>
+          <a:bodyPr wrap="none" rtlCol="0">
+            <a:spAutoFit/>
+          </a:bodyPr>
+          <a:lstStyle/>
+          <a:p>
+            <a:r>
+              <a:rPr lang="en-IN" sz="1400" b="1" dirty="0"/>
+              <a:t>Restaurants</a:t>
+            </a:r>
+          </a:p>
+        </p:txBody>
+      </p:sp>
+      <p:sp>
+        <p:nvSpPr>
+          <p:cNvPr id="20" name="Rectangle: Rounded Corners 19">
+            <a:extLst>
+              <a:ext uri="{FF2B5EF4-FFF2-40B4-BE49-F238E27FC236}">
+                <a16:creationId xmlns:a16="http://schemas.microsoft.com/office/drawing/2014/main" id="{1E12FAF0-EE8D-A983-DF61-729A838E48A1}"/>
+              </a:ext>
+            </a:extLst>
+          </p:cNvPr>
+          <p:cNvSpPr/>
+          <p:nvPr/>
+        </p:nvSpPr>
+        <p:spPr>
+          <a:xfrm>
+            <a:off x="4212214" y="4807271"/>
+            <a:ext cx="1714408" cy="1212529"/>
+          </a:xfrm>
+          <a:prstGeom prst="roundRect">
+            <a:avLst/>
+          </a:prstGeom>
+          <a:solidFill>
+            <a:srgbClr val="FEFCFD"/>
+          </a:solidFill>
+        </p:spPr>
+        <p:style>
+          <a:lnRef idx="2">
+            <a:schemeClr val="accent1">
+              <a:shade val="15000"/>
+            </a:schemeClr>
+          </a:lnRef>
+          <a:fillRef idx="1">
+            <a:schemeClr val="accent1"/>
+          </a:fillRef>
+          <a:effectRef idx="0">
+            <a:schemeClr val="accent1"/>
+          </a:effectRef>
+          <a:fontRef idx="minor">
+            <a:schemeClr val="lt1"/>
+          </a:fontRef>
+        </p:style>
+        <p:txBody>
+          <a:bodyPr rtlCol="0" anchor="ctr"/>
+          <a:lstStyle/>
+          <a:p>
+            <a:pPr algn="ctr"/>
+            <a:endParaRPr lang="en-IN"/>
+          </a:p>
+        </p:txBody>
+      </p:sp>
+      <p:sp>
+        <p:nvSpPr>
+          <p:cNvPr id="21" name="TextBox 20">
+            <a:extLst>
+              <a:ext uri="{FF2B5EF4-FFF2-40B4-BE49-F238E27FC236}">
+                <a16:creationId xmlns:a16="http://schemas.microsoft.com/office/drawing/2014/main" id="{FC7C075E-0537-53FD-79A0-69DAC461123C}"/>
+              </a:ext>
+            </a:extLst>
+          </p:cNvPr>
+          <p:cNvSpPr txBox="1"/>
+          <p:nvPr/>
+        </p:nvSpPr>
+        <p:spPr>
+          <a:xfrm>
+            <a:off x="4292272" y="4905375"/>
+            <a:ext cx="1584088" cy="307777"/>
+          </a:xfrm>
+          <a:prstGeom prst="rect">
+            <a:avLst/>
+          </a:prstGeom>
+          <a:noFill/>
+        </p:spPr>
+        <p:txBody>
+          <a:bodyPr wrap="none" rtlCol="0">
+            <a:spAutoFit/>
+          </a:bodyPr>
+          <a:lstStyle/>
+          <a:p>
+            <a:r>
+              <a:rPr lang="en-IN" sz="1400" b="1" dirty="0"/>
+              <a:t>Delivery Partners</a:t>
+            </a:r>
+          </a:p>
+        </p:txBody>
+      </p:sp>
+      <p:sp>
+        <p:nvSpPr>
+          <p:cNvPr id="22" name="Rectangle: Rounded Corners 21">
+            <a:extLst>
+              <a:ext uri="{FF2B5EF4-FFF2-40B4-BE49-F238E27FC236}">
+                <a16:creationId xmlns:a16="http://schemas.microsoft.com/office/drawing/2014/main" id="{3B1DA729-441C-9ECC-DC69-C91C6740DABF}"/>
+              </a:ext>
+            </a:extLst>
+          </p:cNvPr>
+          <p:cNvSpPr/>
+          <p:nvPr/>
+        </p:nvSpPr>
+        <p:spPr>
+          <a:xfrm>
+            <a:off x="845851" y="5325542"/>
+            <a:ext cx="815405" cy="405882"/>
+          </a:xfrm>
+          <a:prstGeom prst="roundRect">
+            <a:avLst/>
+          </a:prstGeom>
+          <a:solidFill>
+            <a:srgbClr val="EC5A01"/>
+          </a:solidFill>
+          <a:ln>
+            <a:solidFill>
+              <a:srgbClr val="EC5A01"/>
+            </a:solidFill>
+          </a:ln>
+        </p:spPr>
+        <p:style>
+          <a:lnRef idx="2">
+            <a:schemeClr val="accent1">
+              <a:shade val="15000"/>
+            </a:schemeClr>
+          </a:lnRef>
+          <a:fillRef idx="1">
+            <a:schemeClr val="accent1"/>
+          </a:fillRef>
+          <a:effectRef idx="0">
+            <a:schemeClr val="accent1"/>
+          </a:effectRef>
+          <a:fontRef idx="minor">
+            <a:schemeClr val="lt1"/>
+          </a:fontRef>
+        </p:style>
+        <p:txBody>
+          <a:bodyPr rtlCol="0" anchor="ctr"/>
+          <a:lstStyle/>
+          <a:p>
+            <a:pPr algn="ctr"/>
+            <a:endParaRPr lang="en-IN"/>
+          </a:p>
+        </p:txBody>
+      </p:sp>
+      <p:sp>
+        <p:nvSpPr>
+          <p:cNvPr id="25" name="TextBox 24">
+            <a:extLst>
+              <a:ext uri="{FF2B5EF4-FFF2-40B4-BE49-F238E27FC236}">
+                <a16:creationId xmlns:a16="http://schemas.microsoft.com/office/drawing/2014/main" id="{2B569368-71F9-FCA7-E84F-F7B420C190F0}"/>
+              </a:ext>
+            </a:extLst>
+          </p:cNvPr>
+          <p:cNvSpPr txBox="1"/>
+          <p:nvPr/>
+        </p:nvSpPr>
+        <p:spPr>
+          <a:xfrm>
+            <a:off x="960844" y="5374594"/>
+            <a:ext cx="585417" cy="307777"/>
+          </a:xfrm>
+          <a:prstGeom prst="rect">
+            <a:avLst/>
+          </a:prstGeom>
+          <a:noFill/>
+        </p:spPr>
+        <p:txBody>
+          <a:bodyPr wrap="none" rtlCol="0">
+            <a:spAutoFit/>
+          </a:bodyPr>
+          <a:lstStyle/>
+          <a:p>
+            <a:r>
+              <a:rPr lang="en-IN" sz="1400" b="1" dirty="0"/>
+              <a:t>107K</a:t>
+            </a:r>
+          </a:p>
+        </p:txBody>
+      </p:sp>
+      <p:sp>
+        <p:nvSpPr>
+          <p:cNvPr id="26" name="Rectangle: Rounded Corners 25">
+            <a:extLst>
+              <a:ext uri="{FF2B5EF4-FFF2-40B4-BE49-F238E27FC236}">
+                <a16:creationId xmlns:a16="http://schemas.microsoft.com/office/drawing/2014/main" id="{DE1237CB-BA3E-1FE4-2C75-7FB866A91F38}"/>
+              </a:ext>
+            </a:extLst>
+          </p:cNvPr>
+          <p:cNvSpPr/>
+          <p:nvPr/>
+        </p:nvSpPr>
+        <p:spPr>
+          <a:xfrm>
+            <a:off x="2726451" y="5325542"/>
+            <a:ext cx="815405" cy="405882"/>
+          </a:xfrm>
+          <a:prstGeom prst="roundRect">
+            <a:avLst/>
+          </a:prstGeom>
+          <a:solidFill>
+            <a:srgbClr val="EC5A01"/>
+          </a:solidFill>
+          <a:ln>
+            <a:solidFill>
+              <a:srgbClr val="EC5A01"/>
+            </a:solidFill>
+          </a:ln>
+        </p:spPr>
+        <p:style>
+          <a:lnRef idx="2">
+            <a:schemeClr val="accent1">
+              <a:shade val="15000"/>
+            </a:schemeClr>
+          </a:lnRef>
+          <a:fillRef idx="1">
+            <a:schemeClr val="accent1"/>
+          </a:fillRef>
+          <a:effectRef idx="0">
+            <a:schemeClr val="accent1"/>
+          </a:effectRef>
+          <a:fontRef idx="minor">
+            <a:schemeClr val="lt1"/>
+          </a:fontRef>
+        </p:style>
+        <p:txBody>
+          <a:bodyPr rtlCol="0" anchor="ctr"/>
+          <a:lstStyle/>
+          <a:p>
+            <a:pPr algn="ctr"/>
+            <a:endParaRPr lang="en-IN" dirty="0"/>
+          </a:p>
+        </p:txBody>
+      </p:sp>
+      <p:sp>
+        <p:nvSpPr>
+          <p:cNvPr id="27" name="TextBox 26">
+            <a:extLst>
+              <a:ext uri="{FF2B5EF4-FFF2-40B4-BE49-F238E27FC236}">
+                <a16:creationId xmlns:a16="http://schemas.microsoft.com/office/drawing/2014/main" id="{29D80816-A527-FA6A-D6CE-29EF115CC44E}"/>
+              </a:ext>
+            </a:extLst>
+          </p:cNvPr>
+          <p:cNvSpPr txBox="1"/>
+          <p:nvPr/>
+        </p:nvSpPr>
+        <p:spPr>
+          <a:xfrm>
+            <a:off x="2889535" y="5374593"/>
+            <a:ext cx="489236" cy="307777"/>
+          </a:xfrm>
+          <a:prstGeom prst="rect">
+            <a:avLst/>
+          </a:prstGeom>
+          <a:noFill/>
+        </p:spPr>
+        <p:txBody>
+          <a:bodyPr wrap="none" rtlCol="0">
+            <a:spAutoFit/>
+          </a:bodyPr>
+          <a:lstStyle/>
+          <a:p>
+            <a:r>
+              <a:rPr lang="en-IN" sz="1400" b="1" dirty="0"/>
+              <a:t>18K</a:t>
+            </a:r>
+          </a:p>
+        </p:txBody>
+      </p:sp>
+      <p:sp>
+        <p:nvSpPr>
+          <p:cNvPr id="28" name="Rectangle: Rounded Corners 27">
+            <a:extLst>
+              <a:ext uri="{FF2B5EF4-FFF2-40B4-BE49-F238E27FC236}">
+                <a16:creationId xmlns:a16="http://schemas.microsoft.com/office/drawing/2014/main" id="{E0A4FA32-5219-5B8C-437B-FF29B91F99DE}"/>
+              </a:ext>
+            </a:extLst>
+          </p:cNvPr>
+          <p:cNvSpPr/>
+          <p:nvPr/>
+        </p:nvSpPr>
+        <p:spPr>
+          <a:xfrm>
+            <a:off x="4676613" y="5325542"/>
+            <a:ext cx="815405" cy="405882"/>
+          </a:xfrm>
+          <a:prstGeom prst="roundRect">
+            <a:avLst/>
+          </a:prstGeom>
+          <a:solidFill>
+            <a:srgbClr val="EC5A01"/>
+          </a:solidFill>
+          <a:ln>
+            <a:solidFill>
+              <a:srgbClr val="EC5A01"/>
+            </a:solidFill>
+          </a:ln>
+        </p:spPr>
+        <p:style>
+          <a:lnRef idx="2">
+            <a:schemeClr val="accent1">
+              <a:shade val="15000"/>
+            </a:schemeClr>
+          </a:lnRef>
+          <a:fillRef idx="1">
+            <a:schemeClr val="accent1"/>
+          </a:fillRef>
+          <a:effectRef idx="0">
+            <a:schemeClr val="accent1"/>
+          </a:effectRef>
+          <a:fontRef idx="minor">
+            <a:schemeClr val="lt1"/>
+          </a:fontRef>
+        </p:style>
+        <p:txBody>
+          <a:bodyPr rtlCol="0" anchor="ctr"/>
+          <a:lstStyle/>
+          <a:p>
+            <a:pPr algn="ctr"/>
+            <a:endParaRPr lang="en-IN" dirty="0"/>
+          </a:p>
+        </p:txBody>
+      </p:sp>
+      <p:sp>
+        <p:nvSpPr>
+          <p:cNvPr id="29" name="TextBox 28">
+            <a:extLst>
+              <a:ext uri="{FF2B5EF4-FFF2-40B4-BE49-F238E27FC236}">
+                <a16:creationId xmlns:a16="http://schemas.microsoft.com/office/drawing/2014/main" id="{37EEDEF5-17B3-4CA3-D5DE-45961928D8B6}"/>
+              </a:ext>
+            </a:extLst>
+          </p:cNvPr>
+          <p:cNvSpPr txBox="1"/>
+          <p:nvPr/>
+        </p:nvSpPr>
+        <p:spPr>
+          <a:xfrm>
+            <a:off x="4212214" y="6300389"/>
+            <a:ext cx="489236" cy="307777"/>
+          </a:xfrm>
+          <a:prstGeom prst="rect">
+            <a:avLst/>
+          </a:prstGeom>
+          <a:noFill/>
+        </p:spPr>
+        <p:txBody>
+          <a:bodyPr wrap="none" rtlCol="0">
+            <a:spAutoFit/>
+          </a:bodyPr>
+          <a:lstStyle/>
+          <a:p>
+            <a:r>
+              <a:rPr lang="en-IN" sz="1400" b="1" dirty="0"/>
+              <a:t>18K</a:t>
+            </a:r>
+          </a:p>
+        </p:txBody>
+      </p:sp>
+    </p:spTree>
+    <p:extLst>
+      <p:ext uri="{BB962C8B-B14F-4D97-AF65-F5344CB8AC3E}">
+        <p14:creationId xmlns:p14="http://schemas.microsoft.com/office/powerpoint/2010/main" val="270729526"/>
       </p:ext>
     </p:extLst>
   </p:cSld>
